--- a/materials/pdf/original/DS03_Folien_Bauplan-gesucht.pptx
+++ b/materials/pdf/original/DS03_Folien_Bauplan-gesucht.pptx
@@ -125,19 +125,19 @@
   <p:extLst>
     <p:ext uri="{521415D9-36F7-43E2-AB2F-B90AF26B5E84}">
       <p14:sectionLst xmlns:p14="http://schemas.microsoft.com/office/powerpoint/2010/main">
-        <p14:section name="Start" id="{8bfef6d8-04e6-5f23-5313-90c77a498f29}">
+        <p14:section name="Start" id="{2348375a-eb65-d30a-9485-18fac3cc531a}">
           <p14:sldIdLst>
             <p14:sldId id="256"/>
           </p14:sldIdLst>
         </p14:section>
-        <p14:section name="Einstieg" id="{4292ced9-14b0-ea3e-3ef3-7f218a594127}">
+        <p14:section name="Einstieg" id="{e9d7c44e-5895-8d51-f8be-81a5a4bc45e4}">
           <p14:sldIdLst>
             <p14:sldId id="257"/>
             <p14:sldId id="258"/>
             <p14:sldId id="259"/>
           </p14:sldIdLst>
         </p14:section>
-        <p14:section name="Erarbeitung" id="{0cd5130e-123f-332e-9bbd-c9b2438b34a0}">
+        <p14:section name="Erarbeitung" id="{f2b5c6ee-5273-6e39-f5dc-2a4b01f97835}">
           <p14:sldIdLst>
             <p14:sldId id="260"/>
             <p14:sldId id="261"/>
@@ -149,21 +149,21 @@
             <p14:sldId id="267"/>
           </p14:sldIdLst>
         </p14:section>
-        <p14:section name="Übung" id="{66242b31-3453-2a27-5ed1-d21ddc28693c}">
+        <p14:section name="Übung" id="{272b80de-10b4-1f05-a96f-65ca292fcf4b}">
           <p14:sldIdLst>
             <p14:sldId id="268"/>
             <p14:sldId id="269"/>
             <p14:sldId id="270"/>
           </p14:sldIdLst>
         </p14:section>
-        <p14:section name="Sicherung" id="{c5dcaa22-0cbf-54ff-8bee-d661c0fd137d}">
+        <p14:section name="Sicherung" id="{ce35173b-95e0-63a1-9093-da046a7a6514}">
           <p14:sldIdLst>
             <p14:sldId id="271"/>
             <p14:sldId id="272"/>
             <p14:sldId id="273"/>
           </p14:sldIdLst>
         </p14:section>
-        <p14:section name="Abschluss" id="{efeaaff5-a2c6-086a-ac88-f966d64dbf64}">
+        <p14:section name="Abschluss" id="{bd9c85f6-24eb-abd6-627c-814aa34303bf}">
           <p14:sldIdLst>
             <p14:sldId id="274"/>
           </p14:sldIdLst>
@@ -2483,6 +2483,45 @@
       </p:sp>
       <p:sp>
         <p:nvSpPr>
+          <p:cNvPr id="4" name="Text 1"/>
+          <p:cNvSpPr/>
+          <p:nvPr/>
+        </p:nvSpPr>
+        <p:spPr>
+          <a:xfrm>
+            <a:off x="7985455" y="6473952"/>
+            <a:ext cx="2926080" cy="274320"/>
+          </a:xfrm>
+          <a:prstGeom prst="rect">
+            <a:avLst/>
+          </a:prstGeom>
+          <a:noFill/>
+          <a:ln/>
+        </p:spPr>
+        <p:txBody>
+          <a:bodyPr wrap="square" lIns="0" tIns="0" rIns="0" bIns="0" rtlCol="0" anchor="ctr"/>
+          <a:lstStyle/>
+          <a:p>
+            <a:pPr algn="r" indent="0" marL="0">
+              <a:buNone/>
+            </a:pPr>
+            <a:r>
+              <a:rPr lang="en-US" sz="1100" dirty="0">
+                <a:solidFill>
+                  <a:srgbClr val="5B6770"/>
+                </a:solidFill>
+                <a:latin typeface="Calibri" pitchFamily="34" charset="0"/>
+                <a:ea typeface="Calibri" pitchFamily="34" charset="-122"/>
+                <a:cs typeface="Calibri" pitchFamily="34" charset="-120"/>
+              </a:rPr>
+              <a:t>CC BY-SA 4.0 · Frank Juchim</a:t>
+            </a:r>
+            <a:endParaRPr lang="en-US" sz="1100" dirty="0"/>
+          </a:p>
+        </p:txBody>
+      </p:sp>
+      <p:sp>
+        <p:nvSpPr>
           <p:cNvPr id="25" name="Slide Number Placeholder 0"/>
           <p:cNvSpPr>
             <a:spLocks noGrp="1"/>
@@ -2634,6 +2673,45 @@
                 <a:cs typeface="Calibri" pitchFamily="34" charset="-120"/>
               </a:rPr>
               <a:t>Level 3 · Welt A · Endliche Automaten · gA und eA</a:t>
+            </a:r>
+            <a:endParaRPr lang="en-US" sz="1100" dirty="0"/>
+          </a:p>
+        </p:txBody>
+      </p:sp>
+      <p:sp>
+        <p:nvSpPr>
+          <p:cNvPr id="4" name="Text 1"/>
+          <p:cNvSpPr/>
+          <p:nvPr/>
+        </p:nvSpPr>
+        <p:spPr>
+          <a:xfrm>
+            <a:off x="7985455" y="6473952"/>
+            <a:ext cx="2926080" cy="274320"/>
+          </a:xfrm>
+          <a:prstGeom prst="rect">
+            <a:avLst/>
+          </a:prstGeom>
+          <a:noFill/>
+          <a:ln/>
+        </p:spPr>
+        <p:txBody>
+          <a:bodyPr wrap="square" lIns="0" tIns="0" rIns="0" bIns="0" rtlCol="0" anchor="ctr"/>
+          <a:lstStyle/>
+          <a:p>
+            <a:pPr algn="r" indent="0" marL="0">
+              <a:buNone/>
+            </a:pPr>
+            <a:r>
+              <a:rPr lang="en-US" sz="1100" dirty="0">
+                <a:solidFill>
+                  <a:srgbClr val="5B6770"/>
+                </a:solidFill>
+                <a:latin typeface="Calibri" pitchFamily="34" charset="0"/>
+                <a:ea typeface="Calibri" pitchFamily="34" charset="-122"/>
+                <a:cs typeface="Calibri" pitchFamily="34" charset="-120"/>
+              </a:rPr>
+              <a:t>CC BY-SA 4.0 · Frank Juchim</a:t>
             </a:r>
             <a:endParaRPr lang="en-US" sz="1100" dirty="0"/>
           </a:p>
